--- a/owl-eye-pitch-deck.pptx
+++ b/owl-eye-pitch-deck.pptx
@@ -1498,80 +1498,157 @@
           <a:chExt cx="0" cy="0"/>
         </a:xfrm>
       </p:grpSpPr>
-      <p:sp>
-        <p:nvSpPr>
-          <p:cNvPr id="2" name="Shape 0"/>
-          <p:cNvSpPr/>
-          <p:nvPr/>
-        </p:nvSpPr>
+      <p:pic>
+        <p:nvPicPr>
+          <p:cNvPr id="2" name="Logo Mark" descr="Owl Eye logo"/>
+          <p:cNvPicPr>
+            <a:picLocks noChangeAspect="1"/>
+          </p:cNvPicPr>
+          <p:nvPr/>
+        </p:nvPicPr>
+        <p:blipFill>
+          <a:blip r:embed="rId3"/>
+          <a:stretch>
+            <a:fillRect/>
+          </a:stretch>
+        </p:blipFill>
         <p:spPr>
           <a:xfrm>
             <a:off x="548640" y="502920"/>
             <a:ext cx="457200" cy="457200"/>
           </a:xfrm>
-          <a:prstGeom prst="ellipse">
-            <a:avLst/>
-          </a:prstGeom>
-          <a:solidFill>
-            <a:srgbClr val="0B0E1A"/>
-          </a:solidFill>
-          <a:ln w="15875">
-            <a:solidFill>
-              <a:srgbClr val="D4A24E"/>
-            </a:solidFill>
-            <a:prstDash val="solid"/>
-          </a:ln>
-        </p:spPr>
-      </p:sp>
-      <p:sp>
-        <p:nvSpPr>
-          <p:cNvPr id="3" name="Text 1"/>
-          <p:cNvSpPr txBox="1"/>
-          <p:nvPr/>
-        </p:nvSpPr>
-        <p:spPr>
-          <a:xfrm>
-            <a:off x="548640" y="502920"/>
-            <a:ext cx="457200" cy="457200"/>
-          </a:xfrm>
-          <a:prstGeom prst="rect">
-            <a:avLst/>
-          </a:prstGeom>
-          <a:noFill/>
-          <a:ln/>
-        </p:spPr>
-        <p:txBody>
-          <a:bodyPr wrap="square" lIns="0" tIns="0" rIns="0" bIns="0" rtlCol="0" anchor="ctr"/>
-          <a:lstStyle/>
-          <a:p>
-            <a:pPr algn="ctr" indent="0" marL="0">
-              <a:buNone/>
-            </a:pPr>
-            <a:r>
-              <a:rPr lang="en-US" sz="2000" dirty="0">
+          <a:prstGeom prst="rect">
+            <a:avLst/>
+          </a:prstGeom>
+        </p:spPr>
+      </p:pic>
+      <p:sp>
+        <p:nvSpPr>
+          <p:cNvPr id="4" name="Text 2"/>
+          <p:cNvSpPr txBox="1"/>
+          <p:nvPr/>
+        </p:nvSpPr>
+        <p:spPr>
+          <a:xfrm>
+            <a:off x="1097280" y="502920"/>
+            <a:ext cx="1280160" cy="457200"/>
+          </a:xfrm>
+          <a:prstGeom prst="rect">
+            <a:avLst/>
+          </a:prstGeom>
+          <a:noFill/>
+          <a:ln/>
+        </p:spPr>
+        <p:txBody>
+          <a:bodyPr wrap="square" lIns="0" tIns="0" rIns="0" bIns="0" rtlCol="0" anchor="ctr"/>
+          <a:lstStyle/>
+          <a:p>
+            <a:pPr indent="0" marL="0">
+              <a:buNone/>
+            </a:pPr>
+            <a:r>
+              <a:rPr lang="en-US" sz="1300" b="1" spc="200" kern="0" dirty="0">
+                <a:solidFill>
+                  <a:srgbClr val="9099B0"/>
+                </a:solidFill>
+                <a:latin typeface="Calibri" pitchFamily="34" charset="0"/>
+                <a:ea typeface="Calibri" pitchFamily="34" charset="-122"/>
+                <a:cs typeface="Calibri" pitchFamily="34" charset="-120"/>
+              </a:rPr>
+              <a:t>OWL EYE</a:t>
+            </a:r>
+            <a:endParaRPr lang="en-US" sz="1300" dirty="0"/>
+          </a:p>
+        </p:txBody>
+      </p:sp>
+      <p:sp>
+        <p:nvSpPr>
+          <p:cNvPr id="5" name="Text 3"/>
+          <p:cNvSpPr txBox="1"/>
+          <p:nvPr/>
+        </p:nvSpPr>
+        <p:spPr>
+          <a:xfrm>
+            <a:off x="548640" y="2331720"/>
+            <a:ext cx="5486400" cy="320040"/>
+          </a:xfrm>
+          <a:prstGeom prst="rect">
+            <a:avLst/>
+          </a:prstGeom>
+          <a:noFill/>
+          <a:ln/>
+        </p:spPr>
+        <p:txBody>
+          <a:bodyPr wrap="square" lIns="0" tIns="0" rIns="0" bIns="0" rtlCol="0" anchor="ctr"/>
+          <a:lstStyle/>
+          <a:p>
+            <a:pPr indent="0" marL="0">
+              <a:buNone/>
+            </a:pPr>
+            <a:r>
+              <a:rPr lang="en-US" sz="1200" b="1" spc="200" kern="0" dirty="0">
                 <a:solidFill>
                   <a:srgbClr val="D4A24E"/>
+                </a:solidFill>
+                <a:latin typeface="Calibri" pitchFamily="34" charset="0"/>
+                <a:ea typeface="Calibri" pitchFamily="34" charset="-122"/>
+                <a:cs typeface="Calibri" pitchFamily="34" charset="-120"/>
+              </a:rPr>
+              <a:t>PITCH DECK · 2026</a:t>
+            </a:r>
+            <a:endParaRPr lang="en-US" sz="1200" dirty="0"/>
+          </a:p>
+        </p:txBody>
+      </p:sp>
+      <p:sp>
+        <p:nvSpPr>
+          <p:cNvPr id="6" name="Text 4"/>
+          <p:cNvSpPr txBox="1"/>
+          <p:nvPr/>
+        </p:nvSpPr>
+        <p:spPr>
+          <a:xfrm>
+            <a:off x="548640" y="2697480"/>
+            <a:ext cx="10515600" cy="1280160"/>
+          </a:xfrm>
+          <a:prstGeom prst="rect">
+            <a:avLst/>
+          </a:prstGeom>
+          <a:noFill/>
+          <a:ln/>
+        </p:spPr>
+        <p:txBody>
+          <a:bodyPr wrap="square" lIns="0" tIns="0" rIns="0" bIns="0" rtlCol="0" anchor="ctr"/>
+          <a:lstStyle/>
+          <a:p>
+            <a:pPr indent="0" marL="0">
+              <a:buNone/>
+            </a:pPr>
+            <a:r>
+              <a:rPr lang="en-US" sz="5400" b="1" dirty="0">
+                <a:solidFill>
+                  <a:srgbClr val="F1EDE3"/>
                 </a:solidFill>
                 <a:latin typeface="Cambria" pitchFamily="34" charset="0"/>
                 <a:ea typeface="Cambria" pitchFamily="34" charset="-122"/>
                 <a:cs typeface="Cambria" pitchFamily="34" charset="-120"/>
               </a:rPr>
-              <a:t>👁</a:t>
-            </a:r>
-            <a:endParaRPr lang="en-US" sz="2000" dirty="0"/>
-          </a:p>
-        </p:txBody>
-      </p:sp>
-      <p:sp>
-        <p:nvSpPr>
-          <p:cNvPr id="4" name="Text 2"/>
-          <p:cNvSpPr txBox="1"/>
-          <p:nvPr/>
-        </p:nvSpPr>
-        <p:spPr>
-          <a:xfrm>
-            <a:off x="1097280" y="502920"/>
-            <a:ext cx="1280160" cy="457200"/>
+              <a:t>Owl Eye</a:t>
+            </a:r>
+            <a:endParaRPr lang="en-US" sz="5400" dirty="0"/>
+          </a:p>
+        </p:txBody>
+      </p:sp>
+      <p:sp>
+        <p:nvSpPr>
+          <p:cNvPr id="7" name="Text 5"/>
+          <p:cNvSpPr txBox="1"/>
+          <p:nvPr/>
+        </p:nvSpPr>
+        <p:spPr>
+          <a:xfrm>
+            <a:off x="548640" y="3886200"/>
+            <a:ext cx="7498080" cy="822960"/>
           </a:xfrm>
           <a:prstGeom prst="rect">
             <a:avLst/>
@@ -1587,7 +1664,7 @@
               <a:buNone/>
             </a:pPr>
             <a:r>
-              <a:rPr lang="en-US" sz="1300" b="1" spc="200" kern="0" dirty="0">
+              <a:rPr lang="en-US" sz="1600" dirty="0">
                 <a:solidFill>
                   <a:srgbClr val="9099B0"/>
                 </a:solidFill>
@@ -1595,22 +1672,22 @@
                 <a:ea typeface="Calibri" pitchFamily="34" charset="-122"/>
                 <a:cs typeface="Calibri" pitchFamily="34" charset="-120"/>
               </a:rPr>
-              <a:t>OWL EYE</a:t>
-            </a:r>
-            <a:endParaRPr lang="en-US" sz="1300" dirty="0"/>
-          </a:p>
-        </p:txBody>
-      </p:sp>
-      <p:sp>
-        <p:nvSpPr>
-          <p:cNvPr id="5" name="Text 3"/>
-          <p:cNvSpPr txBox="1"/>
-          <p:nvPr/>
-        </p:nvSpPr>
-        <p:spPr>
-          <a:xfrm>
-            <a:off x="548640" y="2331720"/>
-            <a:ext cx="5486400" cy="320040"/>
+              <a:t>AI-powered video surveillance that turns the cameras you already own into a real-time detection network.</a:t>
+            </a:r>
+            <a:endParaRPr lang="en-US" sz="1600" dirty="0"/>
+          </a:p>
+        </p:txBody>
+      </p:sp>
+      <p:sp>
+        <p:nvSpPr>
+          <p:cNvPr id="8" name="Text 6"/>
+          <p:cNvSpPr txBox="1"/>
+          <p:nvPr/>
+        </p:nvSpPr>
+        <p:spPr>
+          <a:xfrm>
+            <a:off x="548640" y="6355080"/>
+            <a:ext cx="3657600" cy="274320"/>
           </a:xfrm>
           <a:prstGeom prst="rect">
             <a:avLst/>
@@ -1626,137 +1703,44 @@
               <a:buNone/>
             </a:pPr>
             <a:r>
-              <a:rPr lang="en-US" sz="1200" b="1" spc="200" kern="0" dirty="0">
-                <a:solidFill>
-                  <a:srgbClr val="D4A24E"/>
+              <a:rPr lang="en-US" sz="1000" dirty="0">
+                <a:solidFill>
+                  <a:srgbClr val="9099B0"/>
                 </a:solidFill>
                 <a:latin typeface="Calibri" pitchFamily="34" charset="0"/>
                 <a:ea typeface="Calibri" pitchFamily="34" charset="-122"/>
                 <a:cs typeface="Calibri" pitchFamily="34" charset="-120"/>
               </a:rPr>
-              <a:t>PITCH DECK · 2026</a:t>
-            </a:r>
-            <a:endParaRPr lang="en-US" sz="1200" dirty="0"/>
-          </a:p>
-        </p:txBody>
-      </p:sp>
-      <p:sp>
-        <p:nvSpPr>
-          <p:cNvPr id="6" name="Text 4"/>
-          <p:cNvSpPr txBox="1"/>
-          <p:nvPr/>
-        </p:nvSpPr>
-        <p:spPr>
-          <a:xfrm>
-            <a:off x="548640" y="2697480"/>
-            <a:ext cx="10515600" cy="1280160"/>
-          </a:xfrm>
-          <a:prstGeom prst="rect">
-            <a:avLst/>
-          </a:prstGeom>
-          <a:noFill/>
-          <a:ln/>
-        </p:spPr>
-        <p:txBody>
-          <a:bodyPr wrap="square" lIns="0" tIns="0" rIns="0" bIns="0" rtlCol="0" anchor="ctr"/>
-          <a:lstStyle/>
-          <a:p>
-            <a:pPr indent="0" marL="0">
-              <a:buNone/>
-            </a:pPr>
-            <a:r>
-              <a:rPr lang="en-US" sz="5400" b="1" dirty="0">
-                <a:solidFill>
-                  <a:srgbClr val="F1EDE3"/>
-                </a:solidFill>
-                <a:latin typeface="Cambria" pitchFamily="34" charset="0"/>
-                <a:ea typeface="Cambria" pitchFamily="34" charset="-122"/>
-                <a:cs typeface="Cambria" pitchFamily="34" charset="-120"/>
-              </a:rPr>
-              <a:t>Owl Eye</a:t>
-            </a:r>
-            <a:endParaRPr lang="en-US" sz="5400" dirty="0"/>
-          </a:p>
-        </p:txBody>
-      </p:sp>
-      <p:sp>
-        <p:nvSpPr>
-          <p:cNvPr id="7" name="Text 5"/>
-          <p:cNvSpPr txBox="1"/>
-          <p:nvPr/>
-        </p:nvSpPr>
-        <p:spPr>
-          <a:xfrm>
-            <a:off x="548640" y="3886200"/>
-            <a:ext cx="7498080" cy="822960"/>
-          </a:xfrm>
-          <a:prstGeom prst="rect">
-            <a:avLst/>
-          </a:prstGeom>
-          <a:noFill/>
-          <a:ln/>
-        </p:spPr>
-        <p:txBody>
-          <a:bodyPr wrap="square" lIns="0" tIns="0" rIns="0" bIns="0" rtlCol="0" anchor="ctr"/>
-          <a:lstStyle/>
-          <a:p>
-            <a:pPr indent="0" marL="0">
-              <a:buNone/>
-            </a:pPr>
-            <a:r>
-              <a:rPr lang="en-US" sz="1600" dirty="0">
-                <a:solidFill>
-                  <a:srgbClr val="9099B0"/>
-                </a:solidFill>
-                <a:latin typeface="Calibri" pitchFamily="34" charset="0"/>
-                <a:ea typeface="Calibri" pitchFamily="34" charset="-122"/>
-                <a:cs typeface="Calibri" pitchFamily="34" charset="-120"/>
-              </a:rPr>
-              <a:t>AI-powered video surveillance that turns the cameras you already own into a real-time detection network.</a:t>
-            </a:r>
-            <a:endParaRPr lang="en-US" sz="1600" dirty="0"/>
-          </a:p>
-        </p:txBody>
-      </p:sp>
-      <p:sp>
-        <p:nvSpPr>
-          <p:cNvPr id="8" name="Text 6"/>
-          <p:cNvSpPr txBox="1"/>
-          <p:nvPr/>
-        </p:nvSpPr>
-        <p:spPr>
-          <a:xfrm>
-            <a:off x="548640" y="6355080"/>
-            <a:ext cx="3657600" cy="274320"/>
-          </a:xfrm>
-          <a:prstGeom prst="rect">
-            <a:avLst/>
-          </a:prstGeom>
-          <a:noFill/>
-          <a:ln/>
-        </p:spPr>
-        <p:txBody>
-          <a:bodyPr wrap="square" lIns="0" tIns="0" rIns="0" bIns="0" rtlCol="0" anchor="ctr"/>
-          <a:lstStyle/>
-          <a:p>
-            <a:pPr indent="0" marL="0">
-              <a:buNone/>
-            </a:pPr>
-            <a:r>
-              <a:rPr lang="en-US" sz="1000" dirty="0">
-                <a:solidFill>
-                  <a:srgbClr val="9099B0"/>
-                </a:solidFill>
-                <a:latin typeface="Calibri" pitchFamily="34" charset="0"/>
-                <a:ea typeface="Calibri" pitchFamily="34" charset="-122"/>
-                <a:cs typeface="Calibri" pitchFamily="34" charset="-120"/>
-              </a:rPr>
               <a:t>Durban, South Africa</a:t>
             </a:r>
             <a:endParaRPr lang="en-US" sz="1000" dirty="0"/>
           </a:p>
         </p:txBody>
       </p:sp>
+      <p:pic>
+        <p:nvPicPr>
+          <p:cNvPr id="60" name="Owl Eye Primary Logo" descr="Owl Eye logo"/>
+          <p:cNvPicPr>
+            <a:picLocks noChangeAspect="1"/>
+          </p:cNvPicPr>
+          <p:nvPr/>
+        </p:nvPicPr>
+        <p:blipFill>
+          <a:blip r:embed="rId4"/>
+          <a:stretch>
+            <a:fillRect/>
+          </a:stretch>
+        </p:blipFill>
+        <p:spPr>
+          <a:xfrm>
+            <a:off x="8047255" y="1463040"/>
+            <a:ext cx="3444745" cy="3931920"/>
+          </a:xfrm>
+          <a:prstGeom prst="rect">
+            <a:avLst/>
+          </a:prstGeom>
+        </p:spPr>
+      </p:pic>
     </p:spTree>
   </p:cSld>
   <p:clrMapOvr>
@@ -6606,70 +6590,30 @@
           <a:chExt cx="0" cy="0"/>
         </a:xfrm>
       </p:grpSpPr>
-      <p:sp>
-        <p:nvSpPr>
-          <p:cNvPr id="2" name="Shape 0"/>
-          <p:cNvSpPr/>
-          <p:nvPr/>
-        </p:nvSpPr>
+      <p:pic>
+        <p:nvPicPr>
+          <p:cNvPr id="2" name="Logo Mark" descr="Owl Eye logo"/>
+          <p:cNvPicPr>
+            <a:picLocks noChangeAspect="1"/>
+          </p:cNvPicPr>
+          <p:nvPr/>
+        </p:nvPicPr>
+        <p:blipFill>
+          <a:blip r:embed="rId3"/>
+          <a:stretch>
+            <a:fillRect/>
+          </a:stretch>
+        </p:blipFill>
         <p:spPr>
           <a:xfrm>
             <a:off x="548640" y="502920"/>
             <a:ext cx="457200" cy="457200"/>
           </a:xfrm>
-          <a:prstGeom prst="ellipse">
-            <a:avLst/>
-          </a:prstGeom>
-          <a:solidFill>
-            <a:srgbClr val="0B0E1A"/>
-          </a:solidFill>
-          <a:ln w="15875">
-            <a:solidFill>
-              <a:srgbClr val="D4A24E"/>
-            </a:solidFill>
-            <a:prstDash val="solid"/>
-          </a:ln>
-        </p:spPr>
-      </p:sp>
-      <p:sp>
-        <p:nvSpPr>
-          <p:cNvPr id="3" name="Text 1"/>
-          <p:cNvSpPr txBox="1"/>
-          <p:nvPr/>
-        </p:nvSpPr>
-        <p:spPr>
-          <a:xfrm>
-            <a:off x="548640" y="502920"/>
-            <a:ext cx="457200" cy="457200"/>
-          </a:xfrm>
-          <a:prstGeom prst="rect">
-            <a:avLst/>
-          </a:prstGeom>
-          <a:noFill/>
-          <a:ln/>
-        </p:spPr>
-        <p:txBody>
-          <a:bodyPr wrap="square" lIns="0" tIns="0" rIns="0" bIns="0" rtlCol="0" anchor="ctr"/>
-          <a:lstStyle/>
-          <a:p>
-            <a:pPr algn="ctr" indent="0" marL="0">
-              <a:buNone/>
-            </a:pPr>
-            <a:r>
-              <a:rPr lang="en-US" sz="2000" dirty="0">
-                <a:solidFill>
-                  <a:srgbClr val="D4A24E"/>
-                </a:solidFill>
-                <a:latin typeface="Cambria" pitchFamily="34" charset="0"/>
-                <a:ea typeface="Cambria" pitchFamily="34" charset="-122"/>
-                <a:cs typeface="Cambria" pitchFamily="34" charset="-120"/>
-              </a:rPr>
-              <a:t>👁</a:t>
-            </a:r>
-            <a:endParaRPr lang="en-US" sz="2000" dirty="0"/>
-          </a:p>
-        </p:txBody>
-      </p:sp>
+          <a:prstGeom prst="rect">
+            <a:avLst/>
+          </a:prstGeom>
+        </p:spPr>
+      </p:pic>
       <p:sp>
         <p:nvSpPr>
           <p:cNvPr id="4" name="Text 2"/>
